--- a/game-design/sbs-game-academy/지정된 점프 규칙을 가지고 플로우차트 만들기.pptx
+++ b/game-design/sbs-game-academy/지정된 점프 규칙을 가지고 플로우차트 만들기.pptx
@@ -3388,7 +3388,7 @@
         </p:nvSpPr>
         <p:spPr>
           <a:xfrm>
-            <a:off x="5111083" y="2105021"/>
+            <a:off x="5118221" y="2993747"/>
             <a:ext cx="2487039" cy="782267"/>
           </a:xfrm>
           <a:prstGeom prst="flowChartDecision">
@@ -3418,7 +3418,23 @@
             <a:pPr algn="ctr"/>
             <a:r>
               <a:rPr lang="ko-KR" altLang="en-US" sz="1000" b="1" dirty="0"/>
-              <a:t>점프 상승 중 상단 지형과 충돌했는가</a:t>
+              <a:t>점프 상승 중 상단 지형</a:t>
+            </a:r>
+            <a:r>
+              <a:rPr lang="en-US" altLang="ko-KR" sz="1000" b="1" dirty="0"/>
+              <a:t>(</a:t>
+            </a:r>
+            <a:r>
+              <a:rPr lang="ko-KR" altLang="en-US" sz="1000" b="1" dirty="0"/>
+              <a:t>천장</a:t>
+            </a:r>
+            <a:r>
+              <a:rPr lang="en-US" altLang="ko-KR" sz="1000" b="1" dirty="0"/>
+              <a:t>)</a:t>
+            </a:r>
+            <a:r>
+              <a:rPr lang="ko-KR" altLang="en-US" sz="1000" b="1" dirty="0"/>
+              <a:t>과 충돌했는가</a:t>
             </a:r>
             <a:r>
               <a:rPr lang="en-US" altLang="ko-KR" sz="1000" b="1" dirty="0"/>
@@ -3730,7 +3746,7 @@
         </p:nvSpPr>
         <p:spPr>
           <a:xfrm>
-            <a:off x="2277054" y="4441873"/>
+            <a:off x="2265809" y="4417618"/>
             <a:ext cx="1580416" cy="321365"/>
           </a:xfrm>
           <a:prstGeom prst="flowChartProcess">
@@ -3919,13 +3935,13 @@
         </p:nvCxnSpPr>
         <p:spPr>
           <a:xfrm rot="10800000" flipH="1" flipV="1">
-            <a:off x="5111083" y="2496154"/>
-            <a:ext cx="550764" cy="1495631"/>
+            <a:off x="5118221" y="3384880"/>
+            <a:ext cx="543626" cy="606905"/>
           </a:xfrm>
           <a:prstGeom prst="bentConnector4">
             <a:avLst>
-              <a:gd name="adj1" fmla="val -41506"/>
-              <a:gd name="adj2" fmla="val 63076"/>
+              <a:gd name="adj1" fmla="val -42051"/>
+              <a:gd name="adj2" fmla="val 82224"/>
             </a:avLst>
           </a:prstGeom>
           <a:ln>
@@ -3958,17 +3974,17 @@
           </p:cNvPr>
           <p:cNvCxnSpPr>
             <a:cxnSpLocks/>
-            <a:stCxn id="14" idx="3"/>
-            <a:endCxn id="129" idx="0"/>
+            <a:stCxn id="430" idx="2"/>
+            <a:endCxn id="14" idx="0"/>
           </p:cNvCxnSpPr>
           <p:nvPr/>
         </p:nvCxnSpPr>
         <p:spPr>
           <a:xfrm>
-            <a:off x="7598122" y="2496155"/>
-            <a:ext cx="197953" cy="1623832"/>
-          </a:xfrm>
-          <a:prstGeom prst="bentConnector2">
+            <a:off x="6361741" y="2661300"/>
+            <a:ext cx="0" cy="332447"/>
+          </a:xfrm>
+          <a:prstGeom prst="straightConnector1">
             <a:avLst/>
           </a:prstGeom>
           <a:ln>
@@ -4050,20 +4066,17 @@
           </p:cNvPr>
           <p:cNvCxnSpPr>
             <a:cxnSpLocks/>
-            <a:stCxn id="264" idx="2"/>
+            <a:stCxn id="264" idx="1"/>
           </p:cNvCxnSpPr>
           <p:nvPr/>
         </p:nvCxnSpPr>
         <p:spPr>
-          <a:xfrm rot="5400000" flipH="1">
-            <a:off x="6638465" y="3751336"/>
-            <a:ext cx="174654" cy="2140566"/>
-          </a:xfrm>
-          <a:prstGeom prst="bentConnector4">
-            <a:avLst>
-              <a:gd name="adj1" fmla="val -130887"/>
-              <a:gd name="adj2" fmla="val 69350"/>
-            </a:avLst>
+          <a:xfrm flipH="1">
+            <a:off x="5655509" y="4668000"/>
+            <a:ext cx="1308165" cy="0"/>
+          </a:xfrm>
+          <a:prstGeom prst="straightConnector1">
+            <a:avLst/>
           </a:prstGeom>
           <a:ln>
             <a:tailEnd type="triangle"/>
@@ -4202,8 +4215,8 @@
         </p:nvCxnSpPr>
         <p:spPr>
           <a:xfrm rot="16200000" flipH="1">
-            <a:off x="2322342" y="3696953"/>
-            <a:ext cx="692144" cy="797696"/>
+            <a:off x="2328847" y="3690447"/>
+            <a:ext cx="667889" cy="786451"/>
           </a:xfrm>
           <a:prstGeom prst="bentConnector3">
             <a:avLst>
@@ -4229,49 +4242,6 @@
           </a:fontRef>
         </p:style>
       </p:cxnSp>
-      <p:cxnSp>
-        <p:nvCxnSpPr>
-          <p:cNvPr id="68" name="직선 화살표 연결선 67">
-            <a:extLst>
-              <a:ext uri="{FF2B5EF4-FFF2-40B4-BE49-F238E27FC236}">
-                <a16:creationId xmlns:a16="http://schemas.microsoft.com/office/drawing/2014/main" id="{93225FE1-EFD3-4267-B2D0-000C9A523D80}"/>
-              </a:ext>
-            </a:extLst>
-          </p:cNvPr>
-          <p:cNvCxnSpPr>
-            <a:cxnSpLocks/>
-            <a:stCxn id="129" idx="2"/>
-            <a:endCxn id="264" idx="0"/>
-          </p:cNvCxnSpPr>
-          <p:nvPr/>
-        </p:nvCxnSpPr>
-        <p:spPr>
-          <a:xfrm>
-            <a:off x="7796075" y="4441352"/>
-            <a:ext cx="0" cy="146229"/>
-          </a:xfrm>
-          <a:prstGeom prst="straightConnector1">
-            <a:avLst/>
-          </a:prstGeom>
-          <a:ln>
-            <a:tailEnd type="triangle"/>
-          </a:ln>
-        </p:spPr>
-        <p:style>
-          <a:lnRef idx="3">
-            <a:schemeClr val="dk1"/>
-          </a:lnRef>
-          <a:fillRef idx="0">
-            <a:schemeClr val="dk1"/>
-          </a:fillRef>
-          <a:effectRef idx="2">
-            <a:schemeClr val="dk1"/>
-          </a:effectRef>
-          <a:fontRef idx="minor">
-            <a:schemeClr val="tx1"/>
-          </a:fontRef>
-        </p:style>
-      </p:cxnSp>
       <p:sp>
         <p:nvSpPr>
           <p:cNvPr id="78" name="순서도: 수행의 시작/종료 77">
@@ -4286,7 +4256,7 @@
         </p:nvSpPr>
         <p:spPr>
           <a:xfrm>
-            <a:off x="4670620" y="6316116"/>
+            <a:off x="9008372" y="6096751"/>
             <a:ext cx="1318190" cy="299068"/>
           </a:xfrm>
           <a:prstGeom prst="flowChartTerminator">
@@ -4339,7 +4309,7 @@
         </p:nvSpPr>
         <p:spPr>
           <a:xfrm>
-            <a:off x="342684" y="4984779"/>
+            <a:off x="17606" y="5116642"/>
             <a:ext cx="2112838" cy="941206"/>
           </a:xfrm>
           <a:prstGeom prst="flowChartDecision">
@@ -4397,8 +4367,8 @@
         </p:nvCxnSpPr>
         <p:spPr>
           <a:xfrm rot="16200000" flipH="1">
-            <a:off x="3422049" y="4408450"/>
-            <a:ext cx="1552878" cy="2262453"/>
+            <a:off x="5682858" y="2112142"/>
+            <a:ext cx="1357768" cy="6611450"/>
           </a:xfrm>
           <a:prstGeom prst="bentConnector3">
             <a:avLst>
@@ -4442,8 +4412,8 @@
         </p:nvCxnSpPr>
         <p:spPr>
           <a:xfrm rot="16200000" flipH="1">
-            <a:off x="1018484" y="4604160"/>
-            <a:ext cx="250486" cy="510751"/>
+            <a:off x="790014" y="4832630"/>
+            <a:ext cx="382349" cy="185673"/>
           </a:xfrm>
           <a:prstGeom prst="bentConnector3">
             <a:avLst>
@@ -4487,8 +4457,8 @@
         </p:nvCxnSpPr>
         <p:spPr>
           <a:xfrm rot="16200000" flipH="1">
-            <a:off x="1661797" y="5663291"/>
-            <a:ext cx="158112" cy="683500"/>
+            <a:off x="1784791" y="5347082"/>
+            <a:ext cx="188438" cy="1609970"/>
           </a:xfrm>
           <a:prstGeom prst="bentConnector2">
             <a:avLst/>
@@ -4526,8 +4496,8 @@
         </p:nvSpPr>
         <p:spPr>
           <a:xfrm>
-            <a:off x="2082603" y="5923414"/>
-            <a:ext cx="1580416" cy="321365"/>
+            <a:off x="2683995" y="6026058"/>
+            <a:ext cx="1580416" cy="440455"/>
           </a:xfrm>
           <a:prstGeom prst="flowChartProcess">
             <a:avLst/>
@@ -4556,61 +4526,7 @@
             <a:pPr algn="ctr"/>
             <a:r>
               <a:rPr lang="ko-KR" altLang="en-US" sz="1000" b="1" dirty="0"/>
-              <a:t>착지할 타일이 없으면 사망한다</a:t>
-            </a:r>
-            <a:r>
-              <a:rPr lang="en-US" altLang="ko-KR" sz="1000" b="1" dirty="0"/>
-              <a:t>.</a:t>
-            </a:r>
-            <a:endParaRPr lang="ko-KR" altLang="en-US" sz="1000" b="1" dirty="0"/>
-          </a:p>
-        </p:txBody>
-      </p:sp>
-      <p:sp>
-        <p:nvSpPr>
-          <p:cNvPr id="98" name="순서도: 처리 97">
-            <a:extLst>
-              <a:ext uri="{FF2B5EF4-FFF2-40B4-BE49-F238E27FC236}">
-                <a16:creationId xmlns:a16="http://schemas.microsoft.com/office/drawing/2014/main" id="{F8D744BD-A71C-43C9-9E39-DB2A73F6A802}"/>
-              </a:ext>
-            </a:extLst>
-          </p:cNvPr>
-          <p:cNvSpPr/>
-          <p:nvPr/>
-        </p:nvSpPr>
-        <p:spPr>
-          <a:xfrm>
-            <a:off x="2082603" y="6446424"/>
-            <a:ext cx="1580416" cy="321365"/>
-          </a:xfrm>
-          <a:prstGeom prst="flowChartProcess">
-            <a:avLst/>
-          </a:prstGeom>
-        </p:spPr>
-        <p:style>
-          <a:lnRef idx="2">
-            <a:schemeClr val="accent1">
-              <a:shade val="50000"/>
-            </a:schemeClr>
-          </a:lnRef>
-          <a:fillRef idx="1">
-            <a:schemeClr val="accent1"/>
-          </a:fillRef>
-          <a:effectRef idx="0">
-            <a:schemeClr val="accent1"/>
-          </a:effectRef>
-          <a:fontRef idx="minor">
-            <a:schemeClr val="lt1"/>
-          </a:fontRef>
-        </p:style>
-        <p:txBody>
-          <a:bodyPr rtlCol="0" anchor="ctr"/>
-          <a:lstStyle/>
-          <a:p>
-            <a:pPr algn="ctr"/>
-            <a:r>
-              <a:rPr lang="ko-KR" altLang="en-US" sz="1000" b="1" dirty="0"/>
-              <a:t>착지할 타일이 존재하면 착지한다</a:t>
+              <a:t>착지할 지형이 없고 맵 아래 밖으로 이탈 시 사망한다</a:t>
             </a:r>
             <a:r>
               <a:rPr lang="en-US" altLang="ko-KR" sz="1000" b="1" dirty="0"/>
@@ -4631,20 +4547,18 @@
           </p:cNvPr>
           <p:cNvCxnSpPr>
             <a:cxnSpLocks/>
-            <a:stCxn id="85" idx="1"/>
-            <a:endCxn id="98" idx="1"/>
+            <a:stCxn id="85" idx="3"/>
+            <a:endCxn id="264" idx="2"/>
           </p:cNvCxnSpPr>
           <p:nvPr/>
         </p:nvCxnSpPr>
         <p:spPr>
-          <a:xfrm rot="10800000" flipH="1" flipV="1">
-            <a:off x="342683" y="5455381"/>
-            <a:ext cx="1739919" cy="1151725"/>
-          </a:xfrm>
-          <a:prstGeom prst="bentConnector3">
-            <a:avLst>
-              <a:gd name="adj1" fmla="val -13139"/>
-            </a:avLst>
+          <a:xfrm flipV="1">
+            <a:off x="2130444" y="4828682"/>
+            <a:ext cx="5661613" cy="758563"/>
+          </a:xfrm>
+          <a:prstGeom prst="bentConnector2">
+            <a:avLst/>
           </a:prstGeom>
           <a:ln>
             <a:solidFill>
@@ -4907,7 +4821,7 @@
         </p:nvSpPr>
         <p:spPr>
           <a:xfrm>
-            <a:off x="4808869" y="2768172"/>
+            <a:off x="4819335" y="3481449"/>
             <a:ext cx="495453" cy="246221"/>
           </a:xfrm>
           <a:prstGeom prst="rect">
@@ -4942,7 +4856,7 @@
         </p:nvSpPr>
         <p:spPr>
           <a:xfrm>
-            <a:off x="7446868" y="2808149"/>
+            <a:off x="6318417" y="2669831"/>
             <a:ext cx="495453" cy="246221"/>
           </a:xfrm>
           <a:prstGeom prst="rect">
@@ -5012,7 +4926,7 @@
         </p:nvSpPr>
         <p:spPr>
           <a:xfrm>
-            <a:off x="1490003" y="5875620"/>
+            <a:off x="1642993" y="5966997"/>
             <a:ext cx="495453" cy="246221"/>
           </a:xfrm>
           <a:prstGeom prst="rect">
@@ -5082,7 +4996,7 @@
         </p:nvSpPr>
         <p:spPr>
           <a:xfrm>
-            <a:off x="559575" y="6359515"/>
+            <a:off x="4891011" y="5570871"/>
             <a:ext cx="495453" cy="246221"/>
           </a:xfrm>
           <a:prstGeom prst="rect">
@@ -5120,14 +5034,12 @@
           <p:nvPr/>
         </p:nvCxnSpPr>
         <p:spPr>
-          <a:xfrm>
-            <a:off x="3663019" y="6084097"/>
-            <a:ext cx="1007601" cy="381553"/>
-          </a:xfrm>
-          <a:prstGeom prst="bentConnector3">
-            <a:avLst>
-              <a:gd name="adj1" fmla="val 50000"/>
-            </a:avLst>
+          <a:xfrm flipV="1">
+            <a:off x="4264411" y="6246285"/>
+            <a:ext cx="4743961" cy="1"/>
+          </a:xfrm>
+          <a:prstGeom prst="straightConnector1">
+            <a:avLst/>
           </a:prstGeom>
           <a:ln>
             <a:tailEnd type="triangle"/>
@@ -5148,108 +5060,6 @@
           </a:fontRef>
         </p:style>
       </p:cxnSp>
-      <p:cxnSp>
-        <p:nvCxnSpPr>
-          <p:cNvPr id="124" name="직선 화살표 연결선 48">
-            <a:extLst>
-              <a:ext uri="{FF2B5EF4-FFF2-40B4-BE49-F238E27FC236}">
-                <a16:creationId xmlns:a16="http://schemas.microsoft.com/office/drawing/2014/main" id="{09C0D78A-89CF-40A0-B739-F62FE88C66CB}"/>
-              </a:ext>
-            </a:extLst>
-          </p:cNvPr>
-          <p:cNvCxnSpPr>
-            <a:cxnSpLocks/>
-            <a:stCxn id="98" idx="3"/>
-          </p:cNvCxnSpPr>
-          <p:nvPr/>
-        </p:nvCxnSpPr>
-        <p:spPr>
-          <a:xfrm flipV="1">
-            <a:off x="3663019" y="6358379"/>
-            <a:ext cx="513787" cy="248728"/>
-          </a:xfrm>
-          <a:prstGeom prst="bentConnector3">
-            <a:avLst>
-              <a:gd name="adj1" fmla="val 50000"/>
-            </a:avLst>
-          </a:prstGeom>
-          <a:ln>
-            <a:tailEnd type="triangle"/>
-          </a:ln>
-        </p:spPr>
-        <p:style>
-          <a:lnRef idx="3">
-            <a:schemeClr val="dk1"/>
-          </a:lnRef>
-          <a:fillRef idx="0">
-            <a:schemeClr val="dk1"/>
-          </a:fillRef>
-          <a:effectRef idx="2">
-            <a:schemeClr val="dk1"/>
-          </a:effectRef>
-          <a:fontRef idx="minor">
-            <a:schemeClr val="tx1"/>
-          </a:fontRef>
-        </p:style>
-      </p:cxnSp>
-      <p:sp>
-        <p:nvSpPr>
-          <p:cNvPr id="129" name="순서도: 처리 128">
-            <a:extLst>
-              <a:ext uri="{FF2B5EF4-FFF2-40B4-BE49-F238E27FC236}">
-                <a16:creationId xmlns:a16="http://schemas.microsoft.com/office/drawing/2014/main" id="{FD57DA86-7416-43B8-A341-9D01DA4F0162}"/>
-              </a:ext>
-            </a:extLst>
-          </p:cNvPr>
-          <p:cNvSpPr/>
-          <p:nvPr/>
-        </p:nvSpPr>
-        <p:spPr>
-          <a:xfrm>
-            <a:off x="6967692" y="4119987"/>
-            <a:ext cx="1656766" cy="321365"/>
-          </a:xfrm>
-          <a:prstGeom prst="flowChartProcess">
-            <a:avLst/>
-          </a:prstGeom>
-        </p:spPr>
-        <p:style>
-          <a:lnRef idx="2">
-            <a:schemeClr val="accent1">
-              <a:shade val="50000"/>
-            </a:schemeClr>
-          </a:lnRef>
-          <a:fillRef idx="1">
-            <a:schemeClr val="accent1"/>
-          </a:fillRef>
-          <a:effectRef idx="0">
-            <a:schemeClr val="accent1"/>
-          </a:effectRef>
-          <a:fontRef idx="minor">
-            <a:schemeClr val="lt1"/>
-          </a:fontRef>
-        </p:style>
-        <p:txBody>
-          <a:bodyPr rtlCol="0" anchor="ctr"/>
-          <a:lstStyle/>
-          <a:p>
-            <a:pPr algn="ctr"/>
-            <a:r>
-              <a:rPr lang="en-US" altLang="ko-KR" sz="1000" b="1" dirty="0"/>
-              <a:t>2</a:t>
-            </a:r>
-            <a:r>
-              <a:rPr lang="ko-KR" altLang="en-US" sz="1000" b="1" dirty="0"/>
-              <a:t>타일 높이까지 상승한다</a:t>
-            </a:r>
-            <a:r>
-              <a:rPr lang="en-US" altLang="ko-KR" sz="1000" b="1" dirty="0"/>
-              <a:t>.</a:t>
-            </a:r>
-            <a:endParaRPr lang="ko-KR" altLang="en-US" sz="1000" b="1" dirty="0"/>
-          </a:p>
-        </p:txBody>
-      </p:sp>
       <p:sp>
         <p:nvSpPr>
           <p:cNvPr id="161" name="순서도: 판단 160">
@@ -5588,19 +5398,19 @@
           <p:cNvCxnSpPr>
             <a:cxnSpLocks/>
             <a:stCxn id="177" idx="1"/>
-            <a:endCxn id="14" idx="0"/>
+            <a:endCxn id="430" idx="0"/>
           </p:cNvCxnSpPr>
           <p:nvPr/>
         </p:nvCxnSpPr>
         <p:spPr>
           <a:xfrm rot="10800000">
-            <a:off x="6354603" y="2105022"/>
-            <a:ext cx="2218904" cy="656165"/>
+            <a:off x="6361741" y="2027518"/>
+            <a:ext cx="2211766" cy="733668"/>
           </a:xfrm>
           <a:prstGeom prst="bentConnector4">
             <a:avLst>
-              <a:gd name="adj1" fmla="val 21979"/>
-              <a:gd name="adj2" fmla="val 134839"/>
+              <a:gd name="adj1" fmla="val 23515"/>
+              <a:gd name="adj2" fmla="val 131159"/>
             </a:avLst>
           </a:prstGeom>
           <a:ln>
@@ -5754,12 +5564,13 @@
         </p:nvCxnSpPr>
         <p:spPr>
           <a:xfrm flipH="1">
-            <a:off x="5323600" y="1358110"/>
-            <a:ext cx="6477064" cy="4517510"/>
-          </a:xfrm>
-          <a:prstGeom prst="bentConnector3">
+            <a:off x="9667467" y="1358110"/>
+            <a:ext cx="2133197" cy="4291069"/>
+          </a:xfrm>
+          <a:prstGeom prst="bentConnector4">
             <a:avLst>
-              <a:gd name="adj1" fmla="val -3529"/>
+              <a:gd name="adj1" fmla="val -10716"/>
+              <a:gd name="adj2" fmla="val 100028"/>
             </a:avLst>
           </a:prstGeom>
           <a:ln>
@@ -5795,7 +5606,7 @@
         </p:nvSpPr>
         <p:spPr>
           <a:xfrm>
-            <a:off x="6967692" y="4587581"/>
+            <a:off x="6963674" y="4507317"/>
             <a:ext cx="1656766" cy="321365"/>
           </a:xfrm>
           <a:prstGeom prst="flowChartProcess">
@@ -6081,6 +5892,142 @@
               <a:t>.</a:t>
             </a:r>
             <a:endParaRPr lang="ko-KR" altLang="en-US" sz="1000" b="1" dirty="0"/>
+          </a:p>
+        </p:txBody>
+      </p:sp>
+      <p:sp>
+        <p:nvSpPr>
+          <p:cNvPr id="430" name="순서도: 판단 429">
+            <a:extLst>
+              <a:ext uri="{FF2B5EF4-FFF2-40B4-BE49-F238E27FC236}">
+                <a16:creationId xmlns:a16="http://schemas.microsoft.com/office/drawing/2014/main" id="{BA1E4ED3-1046-41E2-A15F-C39D941D7299}"/>
+              </a:ext>
+            </a:extLst>
+          </p:cNvPr>
+          <p:cNvSpPr/>
+          <p:nvPr/>
+        </p:nvSpPr>
+        <p:spPr>
+          <a:xfrm>
+            <a:off x="5190154" y="2027518"/>
+            <a:ext cx="2343174" cy="633782"/>
+          </a:xfrm>
+          <a:prstGeom prst="flowChartDecision">
+            <a:avLst/>
+          </a:prstGeom>
+        </p:spPr>
+        <p:style>
+          <a:lnRef idx="2">
+            <a:schemeClr val="accent1">
+              <a:shade val="50000"/>
+            </a:schemeClr>
+          </a:lnRef>
+          <a:fillRef idx="1">
+            <a:schemeClr val="accent1"/>
+          </a:fillRef>
+          <a:effectRef idx="0">
+            <a:schemeClr val="accent1"/>
+          </a:effectRef>
+          <a:fontRef idx="minor">
+            <a:schemeClr val="lt1"/>
+          </a:fontRef>
+        </p:style>
+        <p:txBody>
+          <a:bodyPr rtlCol="0" anchor="ctr"/>
+          <a:lstStyle/>
+          <a:p>
+            <a:pPr algn="ctr"/>
+            <a:r>
+              <a:rPr lang="en-US" altLang="ko-KR" sz="1000" b="1" dirty="0"/>
+              <a:t>2</a:t>
+            </a:r>
+            <a:r>
+              <a:rPr lang="ko-KR" altLang="en-US" sz="1000" b="1" dirty="0"/>
+              <a:t>타일 높이까지 상승 했는가</a:t>
+            </a:r>
+            <a:r>
+              <a:rPr lang="en-US" altLang="ko-KR" sz="1000" b="1" dirty="0"/>
+              <a:t>?</a:t>
+            </a:r>
+            <a:endParaRPr lang="ko-KR" altLang="en-US" sz="1000" b="1" dirty="0"/>
+          </a:p>
+        </p:txBody>
+      </p:sp>
+      <p:cxnSp>
+        <p:nvCxnSpPr>
+          <p:cNvPr id="441" name="직선 화살표 연결선 26">
+            <a:extLst>
+              <a:ext uri="{FF2B5EF4-FFF2-40B4-BE49-F238E27FC236}">
+                <a16:creationId xmlns:a16="http://schemas.microsoft.com/office/drawing/2014/main" id="{CCA6E5B2-F07D-445D-983E-27BBA9983AD1}"/>
+              </a:ext>
+            </a:extLst>
+          </p:cNvPr>
+          <p:cNvCxnSpPr>
+            <a:cxnSpLocks/>
+            <a:stCxn id="430" idx="3"/>
+            <a:endCxn id="264" idx="0"/>
+          </p:cNvCxnSpPr>
+          <p:nvPr/>
+        </p:nvCxnSpPr>
+        <p:spPr>
+          <a:xfrm>
+            <a:off x="7533328" y="2344409"/>
+            <a:ext cx="258729" cy="2162908"/>
+          </a:xfrm>
+          <a:prstGeom prst="bentConnector2">
+            <a:avLst/>
+          </a:prstGeom>
+          <a:ln>
+            <a:tailEnd type="triangle"/>
+          </a:ln>
+        </p:spPr>
+        <p:style>
+          <a:lnRef idx="3">
+            <a:schemeClr val="accent1"/>
+          </a:lnRef>
+          <a:fillRef idx="0">
+            <a:schemeClr val="accent1"/>
+          </a:fillRef>
+          <a:effectRef idx="2">
+            <a:schemeClr val="accent1"/>
+          </a:effectRef>
+          <a:fontRef idx="minor">
+            <a:schemeClr val="tx1"/>
+          </a:fontRef>
+        </p:style>
+      </p:cxnSp>
+      <p:sp>
+        <p:nvSpPr>
+          <p:cNvPr id="444" name="TextBox 443">
+            <a:extLst>
+              <a:ext uri="{FF2B5EF4-FFF2-40B4-BE49-F238E27FC236}">
+                <a16:creationId xmlns:a16="http://schemas.microsoft.com/office/drawing/2014/main" id="{DA928F7D-0CBC-4869-9D3A-0556B0B996E4}"/>
+              </a:ext>
+            </a:extLst>
+          </p:cNvPr>
+          <p:cNvSpPr txBox="1"/>
+          <p:nvPr/>
+        </p:nvSpPr>
+        <p:spPr>
+          <a:xfrm>
+            <a:off x="7733098" y="3226869"/>
+            <a:ext cx="495453" cy="246221"/>
+          </a:xfrm>
+          <a:prstGeom prst="rect">
+            <a:avLst/>
+          </a:prstGeom>
+          <a:noFill/>
+        </p:spPr>
+        <p:txBody>
+          <a:bodyPr wrap="square" rtlCol="0">
+            <a:spAutoFit/>
+          </a:bodyPr>
+          <a:lstStyle/>
+          <a:p>
+            <a:r>
+              <a:rPr lang="en-US" altLang="ko-KR" sz="1000" b="1" dirty="0"/>
+              <a:t>YES</a:t>
+            </a:r>
           </a:p>
         </p:txBody>
       </p:sp>
